--- a/企画書.pptx
+++ b/企画書.pptx
@@ -3514,7 +3514,7 @@
         <p:spPr>
           <a:xfrm>
             <a:off x="203200" y="1586102"/>
-            <a:ext cx="11760200" cy="3539430"/>
+            <a:ext cx="11760200" cy="2554545"/>
           </a:xfrm>
           <a:prstGeom prst="rect">
             <a:avLst/>
@@ -3529,11 +3529,7 @@
           <a:p>
             <a:r>
               <a:rPr lang="ja-JP" altLang="en-US" sz="3200" dirty="0" smtClean="0"/>
-              <a:t>・プレイヤーを動かすのではなく、ステージを</a:t>
-            </a:r>
-            <a:r>
-              <a:rPr lang="ja-JP" altLang="en-US" sz="3200" dirty="0" smtClean="0"/>
-              <a:t>傾けて</a:t>
+              <a:t>・プレイヤーを動かすのではなく、ステージを傾けて</a:t>
             </a:r>
             <a:r>
               <a:rPr lang="ja-JP" altLang="en-US" sz="3200" dirty="0"/>
@@ -3542,40 +3538,6 @@
             <a:r>
               <a:rPr lang="ja-JP" altLang="en-US" sz="3200" dirty="0" smtClean="0"/>
               <a:t>する</a:t>
-            </a:r>
-            <a:endParaRPr lang="en-US" altLang="ja-JP" sz="3200" dirty="0" smtClean="0"/>
-          </a:p>
-          <a:p>
-            <a:endParaRPr lang="en-US" altLang="ja-JP" sz="3200" dirty="0" smtClean="0"/>
-          </a:p>
-          <a:p>
-            <a:r>
-              <a:rPr kumimoji="1" lang="ja-JP" altLang="en-US" sz="3200" dirty="0" smtClean="0"/>
-              <a:t>・</a:t>
-            </a:r>
-            <a:r>
-              <a:rPr lang="ja-JP" altLang="en-US" sz="3200" dirty="0" smtClean="0"/>
-              <a:t>敵</a:t>
-            </a:r>
-            <a:r>
-              <a:rPr lang="ja-JP" altLang="en-US" sz="3200" dirty="0" smtClean="0"/>
-              <a:t>に</a:t>
-            </a:r>
-            <a:r>
-              <a:rPr lang="ja-JP" altLang="en-US" sz="3200" dirty="0"/>
-              <a:t>上手い</a:t>
-            </a:r>
-            <a:r>
-              <a:rPr lang="ja-JP" altLang="en-US" sz="3200" dirty="0" smtClean="0"/>
-              <a:t>こと攻撃をし、</a:t>
-            </a:r>
-            <a:r>
-              <a:rPr lang="ja-JP" altLang="en-US" sz="3200" dirty="0" smtClean="0"/>
-              <a:t>ダメージ</a:t>
-            </a:r>
-            <a:r>
-              <a:rPr lang="ja-JP" altLang="en-US" sz="3200" dirty="0" smtClean="0"/>
-              <a:t>を与える</a:t>
             </a:r>
             <a:endParaRPr lang="en-US" altLang="ja-JP" sz="3200" dirty="0" smtClean="0"/>
           </a:p>
@@ -3701,7 +3663,7 @@
         <p:spPr>
           <a:xfrm>
             <a:off x="203200" y="1141602"/>
-            <a:ext cx="11760200" cy="5016758"/>
+            <a:ext cx="11760200" cy="3785652"/>
           </a:xfrm>
           <a:prstGeom prst="rect">
             <a:avLst/>
@@ -3716,17 +3678,11 @@
           <a:p>
             <a:r>
               <a:rPr lang="ja-JP" altLang="en-US" sz="4000" dirty="0" smtClean="0"/>
-              <a:t>・コインを使用する</a:t>
-            </a:r>
-            <a:endParaRPr lang="en-US" altLang="ja-JP" sz="4000" dirty="0" smtClean="0"/>
-          </a:p>
-          <a:p>
-            <a:endParaRPr lang="en-US" altLang="ja-JP" sz="4000" dirty="0" smtClean="0"/>
-          </a:p>
-          <a:p>
+              <a:t>・</a:t>
+            </a:r>
             <a:r>
               <a:rPr lang="ja-JP" altLang="en-US" sz="4000" dirty="0" smtClean="0"/>
-              <a:t>・回復薬</a:t>
+              <a:t>回復薬</a:t>
             </a:r>
             <a:endParaRPr lang="en-US" altLang="ja-JP" sz="4000" dirty="0" smtClean="0"/>
           </a:p>
@@ -3744,11 +3700,7 @@
             </a:r>
             <a:r>
               <a:rPr lang="ja-JP" altLang="en-US" sz="4000" dirty="0" smtClean="0"/>
-              <a:t>（</a:t>
-            </a:r>
-            <a:r>
-              <a:rPr lang="ja-JP" altLang="en-US" sz="4000" dirty="0" smtClean="0"/>
-              <a:t>値段によって攻撃力が変わる）</a:t>
+              <a:t>（値段によって攻撃力が変わる）</a:t>
             </a:r>
             <a:endParaRPr lang="en-US" altLang="ja-JP" sz="4000" dirty="0" smtClean="0"/>
           </a:p>

--- a/企画書.pptx
+++ b/企画書.pptx
@@ -250,7 +250,7 @@
           <a:p>
             <a:fld id="{8AB604FC-2B28-4B49-8FF9-87007E37712A}" type="datetimeFigureOut">
               <a:rPr kumimoji="1" lang="ja-JP" altLang="en-US" smtClean="0"/>
-              <a:t>2026/4/17</a:t>
+              <a:t>2026/4/21</a:t>
             </a:fld>
             <a:endParaRPr kumimoji="1" lang="ja-JP" altLang="en-US"/>
           </a:p>
@@ -452,7 +452,7 @@
           <a:p>
             <a:fld id="{8AB604FC-2B28-4B49-8FF9-87007E37712A}" type="datetimeFigureOut">
               <a:rPr kumimoji="1" lang="ja-JP" altLang="en-US" smtClean="0"/>
-              <a:t>2026/4/17</a:t>
+              <a:t>2026/4/21</a:t>
             </a:fld>
             <a:endParaRPr kumimoji="1" lang="ja-JP" altLang="en-US"/>
           </a:p>
@@ -664,7 +664,7 @@
           <a:p>
             <a:fld id="{8AB604FC-2B28-4B49-8FF9-87007E37712A}" type="datetimeFigureOut">
               <a:rPr kumimoji="1" lang="ja-JP" altLang="en-US" smtClean="0"/>
-              <a:t>2026/4/17</a:t>
+              <a:t>2026/4/21</a:t>
             </a:fld>
             <a:endParaRPr kumimoji="1" lang="ja-JP" altLang="en-US"/>
           </a:p>
@@ -866,7 +866,7 @@
           <a:p>
             <a:fld id="{8AB604FC-2B28-4B49-8FF9-87007E37712A}" type="datetimeFigureOut">
               <a:rPr kumimoji="1" lang="ja-JP" altLang="en-US" smtClean="0"/>
-              <a:t>2026/4/17</a:t>
+              <a:t>2026/4/21</a:t>
             </a:fld>
             <a:endParaRPr kumimoji="1" lang="ja-JP" altLang="en-US"/>
           </a:p>
@@ -1112,7 +1112,7 @@
           <a:p>
             <a:fld id="{8AB604FC-2B28-4B49-8FF9-87007E37712A}" type="datetimeFigureOut">
               <a:rPr kumimoji="1" lang="ja-JP" altLang="en-US" smtClean="0"/>
-              <a:t>2026/4/17</a:t>
+              <a:t>2026/4/21</a:t>
             </a:fld>
             <a:endParaRPr kumimoji="1" lang="ja-JP" altLang="en-US"/>
           </a:p>
@@ -1408,7 +1408,7 @@
           <a:p>
             <a:fld id="{8AB604FC-2B28-4B49-8FF9-87007E37712A}" type="datetimeFigureOut">
               <a:rPr kumimoji="1" lang="ja-JP" altLang="en-US" smtClean="0"/>
-              <a:t>2026/4/17</a:t>
+              <a:t>2026/4/21</a:t>
             </a:fld>
             <a:endParaRPr kumimoji="1" lang="ja-JP" altLang="en-US"/>
           </a:p>
@@ -1839,7 +1839,7 @@
           <a:p>
             <a:fld id="{8AB604FC-2B28-4B49-8FF9-87007E37712A}" type="datetimeFigureOut">
               <a:rPr kumimoji="1" lang="ja-JP" altLang="en-US" smtClean="0"/>
-              <a:t>2026/4/17</a:t>
+              <a:t>2026/4/21</a:t>
             </a:fld>
             <a:endParaRPr kumimoji="1" lang="ja-JP" altLang="en-US"/>
           </a:p>
@@ -1957,7 +1957,7 @@
           <a:p>
             <a:fld id="{8AB604FC-2B28-4B49-8FF9-87007E37712A}" type="datetimeFigureOut">
               <a:rPr kumimoji="1" lang="ja-JP" altLang="en-US" smtClean="0"/>
-              <a:t>2026/4/17</a:t>
+              <a:t>2026/4/21</a:t>
             </a:fld>
             <a:endParaRPr kumimoji="1" lang="ja-JP" altLang="en-US"/>
           </a:p>
@@ -2052,7 +2052,7 @@
           <a:p>
             <a:fld id="{8AB604FC-2B28-4B49-8FF9-87007E37712A}" type="datetimeFigureOut">
               <a:rPr kumimoji="1" lang="ja-JP" altLang="en-US" smtClean="0"/>
-              <a:t>2026/4/17</a:t>
+              <a:t>2026/4/21</a:t>
             </a:fld>
             <a:endParaRPr kumimoji="1" lang="ja-JP" altLang="en-US"/>
           </a:p>
@@ -2361,7 +2361,7 @@
           <a:p>
             <a:fld id="{8AB604FC-2B28-4B49-8FF9-87007E37712A}" type="datetimeFigureOut">
               <a:rPr kumimoji="1" lang="ja-JP" altLang="en-US" smtClean="0"/>
-              <a:t>2026/4/17</a:t>
+              <a:t>2026/4/21</a:t>
             </a:fld>
             <a:endParaRPr kumimoji="1" lang="ja-JP" altLang="en-US"/>
           </a:p>
@@ -2614,7 +2614,7 @@
           <a:p>
             <a:fld id="{8AB604FC-2B28-4B49-8FF9-87007E37712A}" type="datetimeFigureOut">
               <a:rPr kumimoji="1" lang="ja-JP" altLang="en-US" smtClean="0"/>
-              <a:t>2026/4/17</a:t>
+              <a:t>2026/4/21</a:t>
             </a:fld>
             <a:endParaRPr kumimoji="1" lang="ja-JP" altLang="en-US"/>
           </a:p>
@@ -2859,7 +2859,7 @@
           <a:p>
             <a:fld id="{8AB604FC-2B28-4B49-8FF9-87007E37712A}" type="datetimeFigureOut">
               <a:rPr kumimoji="1" lang="ja-JP" altLang="en-US" smtClean="0"/>
-              <a:t>2026/4/17</a:t>
+              <a:t>2026/4/21</a:t>
             </a:fld>
             <a:endParaRPr kumimoji="1" lang="ja-JP" altLang="en-US"/>
           </a:p>
@@ -3280,10 +3280,41 @@
           <a:lstStyle/>
           <a:p>
             <a:r>
-              <a:rPr lang="ja-JP" altLang="en-US" dirty="0"/>
+              <a:rPr lang="ja-JP" altLang="en-US" dirty="0" smtClean="0"/>
               <a:t>企画</a:t>
             </a:r>
             <a:endParaRPr kumimoji="1" lang="ja-JP" altLang="en-US" dirty="0"/>
+          </a:p>
+        </p:txBody>
+      </p:sp>
+      <p:sp>
+        <p:nvSpPr>
+          <p:cNvPr id="3" name="テキスト ボックス 2"/>
+          <p:cNvSpPr txBox="1"/>
+          <p:nvPr/>
+        </p:nvSpPr>
+        <p:spPr>
+          <a:xfrm>
+            <a:off x="2635250" y="4106863"/>
+            <a:ext cx="6921500" cy="707886"/>
+          </a:xfrm>
+          <a:prstGeom prst="rect">
+            <a:avLst/>
+          </a:prstGeom>
+          <a:noFill/>
+        </p:spPr>
+        <p:txBody>
+          <a:bodyPr wrap="square" rtlCol="0">
+            <a:spAutoFit/>
+          </a:bodyPr>
+          <a:lstStyle/>
+          <a:p>
+            <a:pPr algn="ctr"/>
+            <a:r>
+              <a:rPr kumimoji="1" lang="ja-JP" altLang="en-US" sz="4000" dirty="0" smtClean="0"/>
+              <a:t>江川　彰馬</a:t>
+            </a:r>
+            <a:endParaRPr kumimoji="1" lang="ja-JP" altLang="en-US" sz="4000" dirty="0"/>
           </a:p>
         </p:txBody>
       </p:sp>
@@ -3333,7 +3364,7 @@
         <p:spPr>
           <a:xfrm>
             <a:off x="0" y="796786"/>
-            <a:ext cx="12192000" cy="4893647"/>
+            <a:ext cx="12192000" cy="4955203"/>
           </a:xfrm>
           <a:prstGeom prst="rect">
             <a:avLst/>
@@ -3377,6 +3408,13 @@
             <a:endParaRPr lang="en-US" altLang="ja-JP" sz="4000" dirty="0" smtClean="0"/>
           </a:p>
           <a:p>
+            <a:r>
+              <a:rPr lang="ja-JP" altLang="en-US" sz="4000" dirty="0"/>
+              <a:t>　</a:t>
+            </a:r>
+            <a:endParaRPr lang="en-US" altLang="ja-JP" sz="4000" dirty="0" smtClean="0"/>
+          </a:p>
+          <a:p>
             <a:endParaRPr kumimoji="1" lang="en-US" altLang="ja-JP" sz="4000" dirty="0" smtClean="0"/>
           </a:p>
           <a:p>
@@ -3392,47 +3430,8 @@
           </a:p>
           <a:p>
             <a:r>
-              <a:rPr lang="ja-JP" altLang="en-US" sz="3600" dirty="0"/>
-              <a:t>・</a:t>
-            </a:r>
-            <a:r>
               <a:rPr lang="ja-JP" altLang="en-US" sz="3600" dirty="0" smtClean="0"/>
-              <a:t>ステージ</a:t>
-            </a:r>
-            <a:r>
-              <a:rPr lang="ja-JP" altLang="en-US" sz="3600" dirty="0"/>
-              <a:t>を</a:t>
-            </a:r>
-            <a:r>
-              <a:rPr lang="ja-JP" altLang="en-US" sz="3600" dirty="0" smtClean="0"/>
-              <a:t>傾けて</a:t>
-            </a:r>
-            <a:r>
-              <a:rPr lang="ja-JP" altLang="en-US" sz="3600" dirty="0"/>
-              <a:t>人型</a:t>
-            </a:r>
-            <a:r>
-              <a:rPr lang="ja-JP" altLang="en-US" sz="3600" dirty="0" smtClean="0"/>
-              <a:t>の</a:t>
-            </a:r>
-            <a:r>
-              <a:rPr lang="ja-JP" altLang="en-US" sz="3600" dirty="0"/>
-              <a:t>プレイヤーを動かし</a:t>
-            </a:r>
-            <a:r>
-              <a:rPr lang="ja-JP" altLang="en-US" sz="3600" dirty="0" smtClean="0"/>
-              <a:t>、</a:t>
-            </a:r>
-            <a:endParaRPr lang="en-US" altLang="ja-JP" sz="3600" dirty="0" smtClean="0"/>
-          </a:p>
-          <a:p>
-            <a:r>
-              <a:rPr lang="ja-JP" altLang="en-US" sz="3600" dirty="0"/>
-              <a:t>　</a:t>
-            </a:r>
-            <a:r>
-              <a:rPr lang="ja-JP" altLang="en-US" sz="3600" dirty="0" smtClean="0"/>
-              <a:t>最終的にボスを倒す</a:t>
+              <a:t>・４ステージをクリアしよう！</a:t>
             </a:r>
             <a:endParaRPr lang="ja-JP" altLang="en-US" sz="3600" dirty="0"/>
           </a:p>
@@ -3514,7 +3513,7 @@
         <p:spPr>
           <a:xfrm>
             <a:off x="203200" y="1586102"/>
-            <a:ext cx="11760200" cy="2554545"/>
+            <a:ext cx="11760200" cy="3046988"/>
           </a:xfrm>
           <a:prstGeom prst="rect">
             <a:avLst/>
@@ -3568,8 +3567,8 @@
               <a:t>でコインを使いアイテム購入</a:t>
             </a:r>
             <a:r>
-              <a:rPr lang="en-US" altLang="ja-JP" sz="3200" dirty="0" smtClean="0"/>
-              <a:t>or</a:t>
+              <a:rPr lang="ja-JP" altLang="en-US" sz="3200" dirty="0"/>
+              <a:t>、</a:t>
             </a:r>
             <a:r>
               <a:rPr lang="ja-JP" altLang="en-US" sz="3200" dirty="0" smtClean="0"/>
@@ -3579,6 +3578,8 @@
               <a:rPr lang="en-US" altLang="ja-JP" sz="3200" dirty="0" smtClean="0"/>
               <a:t>UP</a:t>
             </a:r>
+          </a:p>
+          <a:p>
             <a:endParaRPr lang="en-US" altLang="ja-JP" sz="3200" dirty="0"/>
           </a:p>
         </p:txBody>
@@ -3663,7 +3664,7 @@
         <p:spPr>
           <a:xfrm>
             <a:off x="203200" y="1141602"/>
-            <a:ext cx="11760200" cy="3785652"/>
+            <a:ext cx="11760200" cy="2554545"/>
           </a:xfrm>
           <a:prstGeom prst="rect">
             <a:avLst/>
@@ -3678,29 +3679,7 @@
           <a:p>
             <a:r>
               <a:rPr lang="ja-JP" altLang="en-US" sz="4000" dirty="0" smtClean="0"/>
-              <a:t>・</a:t>
-            </a:r>
-            <a:r>
-              <a:rPr lang="ja-JP" altLang="en-US" sz="4000" dirty="0" smtClean="0"/>
-              <a:t>回復薬</a:t>
-            </a:r>
-            <a:endParaRPr lang="en-US" altLang="ja-JP" sz="4000" dirty="0" smtClean="0"/>
-          </a:p>
-          <a:p>
-            <a:endParaRPr lang="en-US" altLang="ja-JP" sz="4000" dirty="0" smtClean="0"/>
-          </a:p>
-          <a:p>
-            <a:r>
-              <a:rPr kumimoji="1" lang="ja-JP" altLang="en-US" sz="4000" dirty="0" smtClean="0"/>
-              <a:t>・</a:t>
-            </a:r>
-            <a:r>
-              <a:rPr lang="ja-JP" altLang="en-US" sz="4000" dirty="0"/>
-              <a:t>剣</a:t>
-            </a:r>
-            <a:r>
-              <a:rPr lang="ja-JP" altLang="en-US" sz="4000" dirty="0" smtClean="0"/>
-              <a:t>（値段によって攻撃力が変わる）</a:t>
+              <a:t>・回復薬</a:t>
             </a:r>
             <a:endParaRPr lang="en-US" altLang="ja-JP" sz="4000" dirty="0" smtClean="0"/>
           </a:p>
@@ -3829,22 +3808,10 @@
           <a:p>
             <a:r>
               <a:rPr lang="ja-JP" altLang="en-US" sz="3200" dirty="0" smtClean="0"/>
-              <a:t>・</a:t>
+              <a:t>・体　力：</a:t>
             </a:r>
             <a:r>
               <a:rPr lang="en-US" altLang="ja-JP" sz="3200" dirty="0" smtClean="0"/>
-              <a:t>HP</a:t>
-            </a:r>
-            <a:r>
-              <a:rPr lang="ja-JP" altLang="en-US" sz="3200" dirty="0"/>
-              <a:t> </a:t>
-            </a:r>
-            <a:r>
-              <a:rPr lang="ja-JP" altLang="en-US" sz="3200" dirty="0" smtClean="0"/>
-              <a:t>      ：</a:t>
-            </a:r>
-            <a:r>
-              <a:rPr lang="en-US" altLang="ja-JP" sz="3200" dirty="0"/>
               <a:t>50</a:t>
             </a:r>
             <a:r>
@@ -3875,7 +3842,7 @@
             </a:r>
             <a:r>
               <a:rPr lang="ja-JP" altLang="en-US" sz="3200" dirty="0" smtClean="0"/>
-              <a:t>攻撃力 ：</a:t>
+              <a:t>攻撃力：</a:t>
             </a:r>
             <a:r>
               <a:rPr lang="en-US" altLang="ja-JP" sz="3200" dirty="0"/>
@@ -3897,18 +3864,14 @@
           <a:p>
             <a:r>
               <a:rPr lang="ja-JP" altLang="en-US" sz="3200" dirty="0"/>
-              <a:t>・</a:t>
+              <a:t>・防御力</a:t>
             </a:r>
             <a:r>
               <a:rPr lang="ja-JP" altLang="en-US" sz="3200" dirty="0" smtClean="0"/>
-              <a:t>防御力  </a:t>
+              <a:t>：</a:t>
             </a:r>
             <a:r>
               <a:rPr lang="en-US" altLang="ja-JP" sz="3200" dirty="0" smtClean="0"/>
-              <a:t>: </a:t>
-            </a:r>
-            <a:r>
-              <a:rPr lang="en-US" altLang="ja-JP" sz="3200" dirty="0"/>
               <a:t>10</a:t>
             </a:r>
             <a:r>
@@ -4035,8 +3998,8 @@
           <a:lstStyle/>
           <a:p>
             <a:r>
-              <a:rPr lang="ja-JP" altLang="en-US" sz="3200" dirty="0" smtClean="0"/>
-              <a:t>・左クリックで剣を振る</a:t>
+              <a:rPr lang="ja-JP" altLang="en-US" sz="3200" smtClean="0"/>
+              <a:t>・体当たり</a:t>
             </a:r>
             <a:endParaRPr lang="en-US" altLang="ja-JP" sz="3200" dirty="0"/>
           </a:p>
@@ -4052,6 +4015,13 @@
   <p:clrMapOvr>
     <a:masterClrMapping/>
   </p:clrMapOvr>
+  <p:timing>
+    <p:tnLst>
+      <p:par>
+        <p:cTn id="1" dur="indefinite" restart="never" nodeType="tmRoot"/>
+      </p:par>
+    </p:tnLst>
+  </p:timing>
 </p:sld>
 </file>
 
@@ -4230,7 +4200,7 @@
             </a:r>
             <a:r>
               <a:rPr lang="ja-JP" altLang="en-US" sz="3600" dirty="0" smtClean="0"/>
-              <a:t>と攻撃力は、ステージごとに異なる</a:t>
+              <a:t>と攻撃力は、何週目かで異なる</a:t>
             </a:r>
             <a:endParaRPr lang="en-US" altLang="ja-JP" sz="3600" dirty="0" smtClean="0"/>
           </a:p>
@@ -4257,6 +4227,13 @@
   <p:clrMapOvr>
     <a:masterClrMapping/>
   </p:clrMapOvr>
+  <p:timing>
+    <p:tnLst>
+      <p:par>
+        <p:cTn id="1" dur="indefinite" restart="never" nodeType="tmRoot"/>
+      </p:par>
+    </p:tnLst>
+  </p:timing>
 </p:sld>
 </file>
 
@@ -4476,6 +4453,13 @@
   <p:clrMapOvr>
     <a:masterClrMapping/>
   </p:clrMapOvr>
+  <p:timing>
+    <p:tnLst>
+      <p:par>
+        <p:cTn id="1" dur="indefinite" restart="never" nodeType="tmRoot"/>
+      </p:par>
+    </p:tnLst>
+  </p:timing>
 </p:sld>
 </file>
 
@@ -4504,7 +4488,7 @@
         </p:nvSpPr>
         <p:spPr>
           <a:xfrm>
-            <a:off x="203200" y="128787"/>
+            <a:off x="203200" y="728834"/>
             <a:ext cx="7556500" cy="707886"/>
           </a:xfrm>
           <a:prstGeom prst="rect">
@@ -4534,8 +4518,8 @@
         </p:nvSpPr>
         <p:spPr>
           <a:xfrm>
-            <a:off x="0" y="944394"/>
-            <a:ext cx="11760200" cy="1077218"/>
+            <a:off x="203200" y="1635573"/>
+            <a:ext cx="11760200" cy="1569660"/>
           </a:xfrm>
           <a:prstGeom prst="rect">
             <a:avLst/>
@@ -4550,18 +4534,21 @@
           <a:p>
             <a:r>
               <a:rPr lang="ja-JP" altLang="en-US" sz="3200" dirty="0" smtClean="0"/>
-              <a:t>・ゴールを踏むとクリア（敵を倒さなくてもクリア出来る）</a:t>
+              <a:t>・ゴールを踏むと次のステージに進める</a:t>
             </a:r>
             <a:endParaRPr lang="en-US" altLang="ja-JP" sz="3200" dirty="0" smtClean="0"/>
           </a:p>
           <a:p>
             <a:r>
-              <a:rPr lang="ja-JP" altLang="en-US" sz="3200" dirty="0"/>
-              <a:t>　</a:t>
-            </a:r>
-            <a:r>
               <a:rPr lang="ja-JP" altLang="en-US" sz="3200" dirty="0" smtClean="0"/>
-              <a:t>　　　　　　　　　（ボスは、倒さないとクリア出来ない）</a:t>
+              <a:t>（敵を倒さなくてもクリア出来る）</a:t>
+            </a:r>
+            <a:endParaRPr lang="en-US" altLang="ja-JP" sz="3200" dirty="0" smtClean="0"/>
+          </a:p>
+          <a:p>
+            <a:r>
+              <a:rPr lang="ja-JP" altLang="en-US" sz="3200" dirty="0" smtClean="0"/>
+              <a:t>（ボスは、倒さないとクリア出来ない）</a:t>
             </a:r>
             <a:endParaRPr lang="en-US" altLang="ja-JP" sz="3200" dirty="0" smtClean="0"/>
           </a:p>
@@ -4575,7 +4562,7 @@
         </p:nvSpPr>
         <p:spPr>
           <a:xfrm>
-            <a:off x="203200" y="2190892"/>
+            <a:off x="203200" y="3511692"/>
             <a:ext cx="7556500" cy="707886"/>
           </a:xfrm>
           <a:prstGeom prst="rect">
@@ -4605,8 +4592,8 @@
         </p:nvSpPr>
         <p:spPr>
           <a:xfrm>
-            <a:off x="203200" y="3186531"/>
-            <a:ext cx="11760200" cy="3046988"/>
+            <a:off x="203200" y="4418431"/>
+            <a:ext cx="11760200" cy="1569660"/>
           </a:xfrm>
           <a:prstGeom prst="rect">
             <a:avLst/>
@@ -4621,7 +4608,7 @@
           <a:p>
             <a:r>
               <a:rPr lang="ja-JP" altLang="en-US" sz="3200" dirty="0" smtClean="0"/>
-              <a:t>・敵を倒しても再挑戦時、敵復活する</a:t>
+              <a:t>・ステージ挑戦中に死んだ場合、そのステージで得た物は失う</a:t>
             </a:r>
             <a:endParaRPr lang="en-US" altLang="ja-JP" sz="3200" dirty="0" smtClean="0"/>
           </a:p>
@@ -4631,24 +4618,7 @@
           <a:p>
             <a:r>
               <a:rPr lang="ja-JP" altLang="en-US" sz="3200" dirty="0" smtClean="0"/>
-              <a:t>・ステージ挑戦中に死んだ場合、そのステージで得た物は失う</a:t>
-            </a:r>
-            <a:endParaRPr lang="en-US" altLang="ja-JP" sz="3200" dirty="0" smtClean="0"/>
-          </a:p>
-          <a:p>
-            <a:endParaRPr lang="en-US" altLang="ja-JP" sz="3200" dirty="0" smtClean="0"/>
-          </a:p>
-          <a:p>
-            <a:r>
-              <a:rPr lang="ja-JP" altLang="en-US" sz="3200" dirty="0" smtClean="0"/>
-              <a:t>・コインを使用してステージ解放</a:t>
-            </a:r>
-            <a:endParaRPr lang="en-US" altLang="ja-JP" sz="3200" dirty="0" smtClean="0"/>
-          </a:p>
-          <a:p>
-            <a:r>
-              <a:rPr lang="ja-JP" altLang="en-US" sz="3200" dirty="0" smtClean="0"/>
-              <a:t>（ステージ２を飛ばして、ステージ３を解放も出来る）</a:t>
+              <a:t>・残機をすべて使うとゲームオーバー</a:t>
             </a:r>
             <a:endParaRPr lang="en-US" altLang="ja-JP" sz="3200" dirty="0" smtClean="0"/>
           </a:p>
@@ -4664,6 +4634,13 @@
   <p:clrMapOvr>
     <a:masterClrMapping/>
   </p:clrMapOvr>
+  <p:timing>
+    <p:tnLst>
+      <p:par>
+        <p:cTn id="1" dur="indefinite" restart="never" nodeType="tmRoot"/>
+      </p:par>
+    </p:tnLst>
+  </p:timing>
 </p:sld>
 </file>
 
